--- a/Modul Minna 1/Bab 1/26. Minna 1 Tata Bahasa Bab 1 - Slide.pptx
+++ b/Modul Minna 1/Bab 1/26. Minna 1 Tata Bahasa Bab 1 - Slide.pptx
@@ -3008,7 +3008,7 @@
                 <a:ea typeface="Arial" pitchFamily="34" charset="-122"/>
                 <a:cs typeface="Arial" pitchFamily="34" charset="-120"/>
               </a:rPr>
-              <a:t>Sdr. Andi bukan mahasiswa.</a:t>
+              <a:t>Andi bukan mahasiswa.</a:t>
             </a:r>
             <a:endParaRPr lang="en-US" sz="950" dirty="0"/>
           </a:p>
@@ -3658,7 +3658,7 @@
                 <a:ea typeface="Arial" pitchFamily="34" charset="-122"/>
                 <a:cs typeface="Arial" pitchFamily="34" charset="-120"/>
               </a:rPr>
-              <a:t>Apakah Sdr. Budi orang Indonesia?</a:t>
+              <a:t>Apakah Budi orang Indonesia?</a:t>
             </a:r>
             <a:endParaRPr lang="en-US" sz="950" dirty="0"/>
           </a:p>
@@ -4252,7 +4252,7 @@
                 <a:ea typeface="Arial" pitchFamily="34" charset="-122"/>
                 <a:cs typeface="Arial" pitchFamily="34" charset="-120"/>
               </a:rPr>
-              <a:t>Sdr. Budi pegawai perusahaan.</a:t>
+              <a:t>Budi pegawai perusahaan.</a:t>
             </a:r>
             <a:endParaRPr lang="en-US" sz="950" dirty="0"/>
           </a:p>
@@ -4846,7 +4846,7 @@
                 <a:ea typeface="Arial" pitchFamily="34" charset="-122"/>
                 <a:cs typeface="Arial" pitchFamily="34" charset="-120"/>
               </a:rPr>
-              <a:t>Sdr. Budi pegawai (dari) JBridge Center.</a:t>
+              <a:t>Budi pegawai (dari) JBridge Center.</a:t>
             </a:r>
             <a:endParaRPr lang="en-US" sz="950" dirty="0"/>
           </a:p>
@@ -5205,7 +5205,7 @@
                 <a:ea typeface="Arial" pitchFamily="34" charset="-122"/>
                 <a:cs typeface="Arial" pitchFamily="34" charset="-120"/>
               </a:rPr>
-              <a:t>さん  ditempel di belakang nama orang (mirip Bapak/Ibu/Sdr.). JANGAN dipakai untuk diri sendiri. Untuk anak kecil, biasa pakai  〜ちゃん .</a:t>
+              <a:t>さん  ditempel di belakang nama orang (mirip Bapak/Ibu). JANGAN dipakai untuk diri sendiri. Untuk anak kecil, biasa pakai  〜ちゃん .</a:t>
             </a:r>
             <a:endParaRPr lang="en-US" sz="1200" dirty="0"/>
           </a:p>
@@ -5384,7 +5384,7 @@
                 <a:ea typeface="Arial" pitchFamily="34" charset="-122"/>
                 <a:cs typeface="Arial" pitchFamily="34" charset="-120"/>
               </a:rPr>
-              <a:t>Beliau (adalah) Sdr. Budi.</a:t>
+              <a:t>Beliau (adalah) Budi.</a:t>
             </a:r>
             <a:endParaRPr lang="en-US" sz="950" dirty="0"/>
           </a:p>
